--- a/public/templates/report-template.pptx
+++ b/public/templates/report-template.pptx
@@ -24594,95 +24594,6 @@
           </a:p>
         </p:txBody>
       </p:sp>
-      <p:pic>
-        <p:nvPicPr>
-          <p:cNvPr id="2" name="コンテンツプレースホルダ 1"/>
-          <p:cNvPicPr>
-            <a:picLocks noGrp="1" noChangeAspect="1"/>
-          </p:cNvPicPr>
-          <p:nvPr>
-            <p:ph/>
-          </p:nvPr>
-        </p:nvPicPr>
-        <p:blipFill>
-          <a:blip r:embed="rId2"/>
-          <a:stretch>
-            <a:fillRect/>
-          </a:stretch>
-        </p:blipFill>
-        <p:spPr>
-          <a:xfrm>
-            <a:off x="2405380" y="816610"/>
-            <a:ext cx="7381240" cy="5875655"/>
-          </a:xfrm>
-          <a:prstGeom prst="rect">
-            <a:avLst/>
-          </a:prstGeom>
-        </p:spPr>
-      </p:pic>
-      <p:sp>
-        <p:nvSpPr>
-          <p:cNvPr id="5" name="四角形 4"/>
-          <p:cNvSpPr/>
-          <p:nvPr/>
-        </p:nvSpPr>
-        <p:spPr>
-          <a:xfrm>
-            <a:off x="7139305" y="4672330"/>
-            <a:ext cx="1283335" cy="1216025"/>
-          </a:xfrm>
-          <a:prstGeom prst="rect">
-            <a:avLst/>
-          </a:prstGeom>
-          <a:noFill/>
-          <a:ln w="38100">
-            <a:solidFill>
-              <a:schemeClr val="accent2"/>
-            </a:solidFill>
-          </a:ln>
-          <a:extLst>
-            <a:ext uri="{909E8E84-426E-40DD-AFC4-6F175D3DCCD1}">
-              <a14:hiddenFill xmlns:a14="http://schemas.microsoft.com/office/drawing/2010/main">
-                <a:solidFill>
-                  <a:schemeClr val="accent2"/>
-                </a:solidFill>
-              </a14:hiddenFill>
-            </a:ext>
-          </a:extLst>
-        </p:spPr>
-        <p:style>
-          <a:lnRef idx="2">
-            <a:schemeClr val="accent1">
-              <a:shade val="50000"/>
-            </a:schemeClr>
-          </a:lnRef>
-          <a:fillRef idx="1">
-            <a:schemeClr val="accent1"/>
-          </a:fillRef>
-          <a:effectRef idx="0">
-            <a:schemeClr val="accent1"/>
-          </a:effectRef>
-          <a:fontRef idx="minor">
-            <a:schemeClr val="lt1"/>
-          </a:fontRef>
-        </p:style>
-        <p:txBody>
-          <a:bodyPr rot="0" vertOverflow="overflow" horzOverflow="overflow" vert="horz" wrap="square" lIns="144000" tIns="0" rIns="144000" bIns="25200" numCol="1" spcCol="0" rtlCol="0" fromWordArt="0" anchor="ctr" anchorCtr="0" forceAA="0" compatLnSpc="1">
-            <a:noAutofit/>
-          </a:bodyPr>
-          <a:lstStyle/>
-          <a:p>
-            <a:pPr algn="ctr"/>
-            <a:endParaRPr kumimoji="1" lang="ja-JP" altLang="en-US" sz="1400" dirty="0">
-              <a:solidFill>
-                <a:schemeClr val="tx1"/>
-              </a:solidFill>
-              <a:latin typeface="HGPｺﾞｼｯｸM" panose="020B0600000000000000" pitchFamily="50" charset="-128"/>
-              <a:ea typeface="HGPｺﾞｼｯｸM" panose="020B0600000000000000" pitchFamily="50" charset="-128"/>
-            </a:endParaRPr>
-          </a:p>
-        </p:txBody>
-      </p:sp>
     </p:spTree>
   </p:cSld>
   <p:clrMapOvr>

--- a/public/templates/report-template.pptx
+++ b/public/templates/report-template.pptx
@@ -769,68 +769,6 @@
         <c:crosses val="autoZero"/>
         <c:crossBetween val="between"/>
       </c:valAx>
-      <c:valAx>
-        <c:axId val="806142848"/>
-        <c:scaling>
-          <c:orientation val="minMax"/>
-          <c:max val="1500"/>
-          <c:min val="-1500"/>
-        </c:scaling>
-        <c:delete val="0"/>
-        <c:axPos val="t"/>
-        <c:numFmt formatCode="#,##0_ " sourceLinked="1"/>
-        <c:majorTickMark val="none"/>
-        <c:minorTickMark val="none"/>
-        <c:tickLblPos val="nextTo"/>
-        <c:spPr>
-          <a:noFill/>
-          <a:ln>
-            <a:noFill/>
-          </a:ln>
-          <a:effectLst/>
-        </c:spPr>
-        <c:txPr>
-          <a:bodyPr rot="-60000000" spcFirstLastPara="0" vertOverflow="ellipsis" vert="horz" wrap="square" anchor="ctr" anchorCtr="1"/>
-          <a:lstStyle/>
-          <a:p>
-            <a:pPr>
-              <a:defRPr lang="ja-JP" sz="900" b="1" i="0" u="none" strike="noStrike" kern="1200" baseline="0">
-                <a:solidFill>
-                  <a:schemeClr val="tx1">
-                    <a:lumMod val="65000"/>
-                    <a:lumOff val="35000"/>
-                  </a:schemeClr>
-                </a:solidFill>
-                <a:latin typeface="+mn-lt"/>
-                <a:ea typeface="+mn-ea"/>
-                <a:cs typeface="+mn-cs"/>
-              </a:defRPr>
-            </a:pPr>
-            <a:endParaRPr lang="ja-JP"/>
-          </a:p>
-        </c:txPr>
-        <c:crossAx val="507082113"/>
-        <c:crosses val="max"/>
-        <c:crossBetween val="between"/>
-      </c:valAx>
-      <c:catAx>
-        <c:axId val="507082113"/>
-        <c:scaling>
-          <c:orientation val="minMax"/>
-        </c:scaling>
-        <c:delete val="1"/>
-        <c:axPos val="l"/>
-        <c:numFmt formatCode="General" sourceLinked="1"/>
-        <c:majorTickMark val="none"/>
-        <c:minorTickMark val="none"/>
-        <c:tickLblPos val="nextTo"/>
-        <c:crossAx val="806142848"/>
-        <c:crossesAt val="0"/>
-        <c:auto val="1"/>
-        <c:lblAlgn val="ctr"/>
-        <c:lblOffset val="100"/>
-        <c:noMultiLvlLbl val="0"/>
-      </c:catAx>
       <c:spPr>
         <a:noFill/>
         <a:ln>

--- a/public/templates/report-template.pptx
+++ b/public/templates/report-template.pptx
@@ -558,11 +558,11 @@
           <c:order val="1"/>
           <c:tx>
             <c:strRef>
-              <c:f>Sheet1!$B$1</c:f>
+              <c:f>Sheet1!$C$1</c:f>
               <c:strCache>
                 <c:ptCount val="1"/>
                 <c:pt idx="0">
-                  <c:v>1km圏人口</c:v>
+                  <c:v>女性</c:v>
                 </c:pt>
               </c:strCache>
             </c:strRef>
@@ -611,33 +611,33 @@
           </c:cat>
           <c:val>
             <c:numRef>
-              <c:f>Sheet1!$B$2:$B$9</c:f>
+              <c:f>Sheet1!$C$2:$C$9</c:f>
               <c:numCache>
-                <c:formatCode>#,##0</c:formatCode>
+                <c:formatCode>#,##0_ </c:formatCode>
                 <c:ptCount val="8"/>
                 <c:pt idx="0">
-                  <c:v>0</c:v>
+                  <c:v>743</c:v>
                 </c:pt>
                 <c:pt idx="1">
-                  <c:v>0</c:v>
+                  <c:v>1001</c:v>
                 </c:pt>
                 <c:pt idx="2">
-                  <c:v>0</c:v>
+                  <c:v>807</c:v>
                 </c:pt>
                 <c:pt idx="3">
-                  <c:v>0</c:v>
+                  <c:v>673</c:v>
                 </c:pt>
                 <c:pt idx="4">
-                  <c:v>0</c:v>
+                  <c:v>625</c:v>
                 </c:pt>
                 <c:pt idx="5">
-                  <c:v>0</c:v>
+                  <c:v>629</c:v>
                 </c:pt>
                 <c:pt idx="6">
-                  <c:v>0</c:v>
+                  <c:v>588</c:v>
                 </c:pt>
                 <c:pt idx="7">
-                  <c:v>0</c:v>
+                  <c:v>500</c:v>
                 </c:pt>
               </c:numCache>
             </c:numRef>
@@ -659,6 +659,117 @@
         <c:gapWidth val="219"/>
         <c:axId val="722388988"/>
         <c:axId val="893429149"/>
+      </c:barChart>
+      <c:barChart>
+        <c:barDir val="bar"/>
+        <c:grouping val="clustered"/>
+        <c:varyColors val="0"/>
+        <c:ser>
+          <c:idx val="0"/>
+          <c:order val="0"/>
+          <c:tx>
+            <c:strRef>
+              <c:f>Sheet1!$B$1</c:f>
+              <c:strCache>
+                <c:ptCount val="1"/>
+                <c:pt idx="0">
+                  <c:v>男性</c:v>
+                </c:pt>
+              </c:strCache>
+            </c:strRef>
+          </c:tx>
+          <c:spPr>
+            <a:solidFill>
+              <a:schemeClr val="accent1"/>
+            </a:solidFill>
+            <a:ln>
+              <a:noFill/>
+            </a:ln>
+            <a:effectLst/>
+          </c:spPr>
+          <c:invertIfNegative val="0"/>
+          <c:cat>
+            <c:strRef>
+              <c:f>Sheet1!$A$2:$A$9</c:f>
+              <c:strCache>
+                <c:ptCount val="8"/>
+                <c:pt idx="0">
+                  <c:v>２０～２４歳</c:v>
+                </c:pt>
+                <c:pt idx="1">
+                  <c:v>２５～２９歳</c:v>
+                </c:pt>
+                <c:pt idx="2">
+                  <c:v>３０～３４歳</c:v>
+                </c:pt>
+                <c:pt idx="3">
+                  <c:v>３５～３９歳</c:v>
+                </c:pt>
+                <c:pt idx="4">
+                  <c:v>４０～４４歳</c:v>
+                </c:pt>
+                <c:pt idx="5">
+                  <c:v>４５～４９歳</c:v>
+                </c:pt>
+                <c:pt idx="6">
+                  <c:v>５０～５４歳</c:v>
+                </c:pt>
+                <c:pt idx="7">
+                  <c:v>５５～５９歳</c:v>
+                </c:pt>
+              </c:strCache>
+            </c:strRef>
+          </c:cat>
+          <c:val>
+            <c:numRef>
+              <c:f>Sheet1!$B$2:$B$9</c:f>
+              <c:numCache>
+                <c:formatCode>#,##0_ </c:formatCode>
+                <c:ptCount val="8"/>
+                <c:pt idx="0">
+                  <c:v>667</c:v>
+                </c:pt>
+                <c:pt idx="1">
+                  <c:v>930</c:v>
+                </c:pt>
+                <c:pt idx="2">
+                  <c:v>789</c:v>
+                </c:pt>
+                <c:pt idx="3">
+                  <c:v>683</c:v>
+                </c:pt>
+                <c:pt idx="4">
+                  <c:v>667</c:v>
+                </c:pt>
+                <c:pt idx="5">
+                  <c:v>754</c:v>
+                </c:pt>
+                <c:pt idx="6">
+                  <c:v>742</c:v>
+                </c:pt>
+                <c:pt idx="7">
+                  <c:v>618</c:v>
+                </c:pt>
+              </c:numCache>
+            </c:numRef>
+          </c:val>
+          <c:extLst>
+            <c:ext xmlns:c16="http://schemas.microsoft.com/office/drawing/2014/chart" uri="{C3380CC4-5D6E-409C-BE32-E72D297353CC}">
+              <c16:uniqueId val="{00000001-D61C-4322-AAB2-399E389B02E6}"/>
+            </c:ext>
+          </c:extLst>
+        </c:ser>
+        <c:dLbls>
+          <c:showLegendKey val="0"/>
+          <c:showVal val="0"/>
+          <c:showCatName val="0"/>
+          <c:showSerName val="0"/>
+          <c:showPercent val="0"/>
+          <c:showBubbleSize val="0"/>
+        </c:dLbls>
+        <c:gapWidth val="219"/>
+        <c:axId val="507082113"/>
+        <c:axId val="806142848"/>
       </c:barChart>
       <c:catAx>
         <c:axId val="722388988"/>
@@ -769,6 +880,68 @@
         <c:crosses val="autoZero"/>
         <c:crossBetween val="between"/>
       </c:valAx>
+      <c:valAx>
+        <c:axId val="806142848"/>
+        <c:scaling>
+          <c:orientation val="minMax"/>
+          <c:max val="1500"/>
+          <c:min val="-1500"/>
+        </c:scaling>
+        <c:delete val="0"/>
+        <c:axPos val="t"/>
+        <c:numFmt formatCode="#,##0_ " sourceLinked="1"/>
+        <c:majorTickMark val="none"/>
+        <c:minorTickMark val="none"/>
+        <c:tickLblPos val="nextTo"/>
+        <c:spPr>
+          <a:noFill/>
+          <a:ln>
+            <a:noFill/>
+          </a:ln>
+          <a:effectLst/>
+        </c:spPr>
+        <c:txPr>
+          <a:bodyPr rot="-60000000" spcFirstLastPara="0" vertOverflow="ellipsis" vert="horz" wrap="square" anchor="ctr" anchorCtr="1"/>
+          <a:lstStyle/>
+          <a:p>
+            <a:pPr>
+              <a:defRPr lang="ja-JP" sz="900" b="1" i="0" u="none" strike="noStrike" kern="1200" baseline="0">
+                <a:solidFill>
+                  <a:schemeClr val="tx1">
+                    <a:lumMod val="65000"/>
+                    <a:lumOff val="35000"/>
+                  </a:schemeClr>
+                </a:solidFill>
+                <a:latin typeface="+mn-lt"/>
+                <a:ea typeface="+mn-ea"/>
+                <a:cs typeface="+mn-cs"/>
+              </a:defRPr>
+            </a:pPr>
+            <a:endParaRPr lang="ja-JP"/>
+          </a:p>
+        </c:txPr>
+        <c:crossAx val="507082113"/>
+        <c:crosses val="max"/>
+        <c:crossBetween val="between"/>
+      </c:valAx>
+      <c:catAx>
+        <c:axId val="507082113"/>
+        <c:scaling>
+          <c:orientation val="minMax"/>
+        </c:scaling>
+        <c:delete val="1"/>
+        <c:axPos val="l"/>
+        <c:numFmt formatCode="General" sourceLinked="1"/>
+        <c:majorTickMark val="none"/>
+        <c:minorTickMark val="none"/>
+        <c:tickLblPos val="nextTo"/>
+        <c:crossAx val="806142848"/>
+        <c:crossesAt val="0"/>
+        <c:auto val="1"/>
+        <c:lblAlgn val="ctr"/>
+        <c:lblOffset val="100"/>
+        <c:noMultiLvlLbl val="0"/>
+      </c:catAx>
       <c:spPr>
         <a:noFill/>
         <a:ln>
